--- a/Seasonal_Agriculture_Performance_Analysis_Presentation.pptx
+++ b/Seasonal_Agriculture_Performance_Analysis_Presentation.pptx
@@ -13674,7 +13674,7 @@
         <p:spPr>
           <a:xfrm>
             <a:off x="729256" y="1440320"/>
-            <a:ext cx="7232875" cy="646331"/>
+            <a:ext cx="7232875" cy="369332"/>
           </a:xfrm>
           <a:prstGeom prst="rect">
             <a:avLst/>
@@ -13688,8 +13688,49 @@
           <a:lstStyle/>
           <a:p>
             <a:r>
+              <a:rPr lang="en-US" dirty="0">
+                <a:hlinkClick r:id="rId3"/>
+              </a:rPr>
+              <a:t>LINK</a:t>
+            </a:r>
+            <a:r>
               <a:rPr lang="en-US" dirty="0"/>
-              <a:t>https://github.com/AswiniKumar55/-Seasonal-Agriculture-Performance-Analysis-.git</a:t>
+              <a:t> </a:t>
+            </a:r>
+          </a:p>
+        </p:txBody>
+      </p:sp>
+      <p:sp>
+        <p:nvSpPr>
+          <p:cNvPr id="2" name="TextBox 1">
+            <a:extLst>
+              <a:ext uri="{FF2B5EF4-FFF2-40B4-BE49-F238E27FC236}">
+                <a16:creationId xmlns:a16="http://schemas.microsoft.com/office/drawing/2014/main" id="{C46E6024-0772-8730-7D0C-2F7C1066F7E0}"/>
+              </a:ext>
+            </a:extLst>
+          </p:cNvPr>
+          <p:cNvSpPr txBox="1"/>
+          <p:nvPr/>
+        </p:nvSpPr>
+        <p:spPr>
+          <a:xfrm>
+            <a:off x="548640" y="2663687"/>
+            <a:ext cx="5653377" cy="666078"/>
+          </a:xfrm>
+          <a:prstGeom prst="rect">
+            <a:avLst/>
+          </a:prstGeom>
+          <a:noFill/>
+        </p:spPr>
+        <p:txBody>
+          <a:bodyPr wrap="square" rtlCol="0">
+            <a:spAutoFit/>
+          </a:bodyPr>
+          <a:lstStyle/>
+          <a:p>
+            <a:r>
+              <a:rPr lang="en-US" dirty="0"/>
+              <a:t>https://github.com/piyushdoshi215-a11y/Seasonal-Agriculture-Performance-Analysis</a:t>
             </a:r>
           </a:p>
         </p:txBody>
@@ -25057,21 +25098,21 @@
 </file>
 
 <file path=customXml/item1.xml><?xml version="1.0" encoding="utf-8"?>
+<p:properties xmlns:p="http://schemas.microsoft.com/office/2006/metadata/properties" xmlns:xsi="http://www.w3.org/2001/XMLSchema-instance" xmlns:pc="http://schemas.microsoft.com/office/infopath/2007/PartnerControls">
+  <documentManagement>
+    <Status xmlns="71af3243-3dd4-4a8d-8c0d-dd76da1f02a5">Not started</Status>
+    <MediaServiceKeyPoints xmlns="71af3243-3dd4-4a8d-8c0d-dd76da1f02a5" xsi:nil="true"/>
+  </documentManagement>
+</p:properties>
+</file>
+
+<file path=customXml/item2.xml><?xml version="1.0" encoding="utf-8"?>
 <?mso-contentType ?>
 <FormTemplates xmlns="http://schemas.microsoft.com/sharepoint/v3/contenttype/forms">
   <Display>DocumentLibraryForm</Display>
   <Edit>DocumentLibraryForm</Edit>
   <New>DocumentLibraryForm</New>
 </FormTemplates>
-</file>
-
-<file path=customXml/item2.xml><?xml version="1.0" encoding="utf-8"?>
-<p:properties xmlns:p="http://schemas.microsoft.com/office/2006/metadata/properties" xmlns:xsi="http://www.w3.org/2001/XMLSchema-instance" xmlns:pc="http://schemas.microsoft.com/office/infopath/2007/PartnerControls">
-  <documentManagement>
-    <Status xmlns="71af3243-3dd4-4a8d-8c0d-dd76da1f02a5">Not started</Status>
-    <MediaServiceKeyPoints xmlns="71af3243-3dd4-4a8d-8c0d-dd76da1f02a5" xsi:nil="true"/>
-  </documentManagement>
-</p:properties>
 </file>
 
 <file path=customXml/item3.xml><?xml version="1.0" encoding="utf-8"?>
@@ -25296,19 +25337,19 @@
 </file>
 
 <file path=customXml/itemProps1.xml><?xml version="1.0" encoding="utf-8"?>
-<ds:datastoreItem xmlns:ds="http://schemas.openxmlformats.org/officeDocument/2006/customXml" ds:itemID="{05D99ABA-76CE-4A8E-B5F0-C051B96628DE}">
+<ds:datastoreItem xmlns:ds="http://schemas.openxmlformats.org/officeDocument/2006/customXml" ds:itemID="{4DEA9014-ED64-4558-B1E1-D03F0EE32BEB}">
   <ds:schemaRefs>
-    <ds:schemaRef ds:uri="http://schemas.microsoft.com/sharepoint/v3/contenttype/forms"/>
+    <ds:schemaRef ds:uri="http://schemas.microsoft.com/office/2006/metadata/properties"/>
+    <ds:schemaRef ds:uri="http://schemas.microsoft.com/office/infopath/2007/PartnerControls"/>
+    <ds:schemaRef ds:uri="71af3243-3dd4-4a8d-8c0d-dd76da1f02a5"/>
   </ds:schemaRefs>
 </ds:datastoreItem>
 </file>
 
 <file path=customXml/itemProps2.xml><?xml version="1.0" encoding="utf-8"?>
-<ds:datastoreItem xmlns:ds="http://schemas.openxmlformats.org/officeDocument/2006/customXml" ds:itemID="{4DEA9014-ED64-4558-B1E1-D03F0EE32BEB}">
+<ds:datastoreItem xmlns:ds="http://schemas.openxmlformats.org/officeDocument/2006/customXml" ds:itemID="{05D99ABA-76CE-4A8E-B5F0-C051B96628DE}">
   <ds:schemaRefs>
-    <ds:schemaRef ds:uri="http://schemas.microsoft.com/office/2006/metadata/properties"/>
-    <ds:schemaRef ds:uri="http://schemas.microsoft.com/office/infopath/2007/PartnerControls"/>
-    <ds:schemaRef ds:uri="71af3243-3dd4-4a8d-8c0d-dd76da1f02a5"/>
+    <ds:schemaRef ds:uri="http://schemas.microsoft.com/sharepoint/v3/contenttype/forms"/>
   </ds:schemaRefs>
 </ds:datastoreItem>
 </file>
